--- a/artifacts/speaking-portfolio-expanded/decks/adaptive-systems-handout.pptx
+++ b/artifacts/speaking-portfolio-expanded/decks/adaptive-systems-handout.pptx
@@ -13875,7 +13875,53 @@
                 <a:ea typeface="Arial"/>
                 <a:cs typeface="Arial"/>
               </a:rPr>
-              <a:t xml:space="preserve">Zoom out from the ingest job. The assistant with every customer's data and a toolbox that can send email, issue refunds, delete records and ship code is not a design we get to decline. It is arriving one integration at a time, and not only in our products. Browsers now ship a chat that drives the page. WebMCP lets an agent act on any site that opts in, and the list of sites that opt in only goes one direction. The next generation of CLIs will take natural language by default, and you will pass `--no-agent` to get the old behavior back. The intermediary intelligence layer is going to wrap everything, and I know who to blame: the kids. Actually, the kids hate AI. It will be their kids who demand an agent safety blanket on everything. I will be in a rocking chair explaining that the internet was better on vinyl.</a:t>
+              <a:t xml:space="preserve">Zoom out from the ingest job. The assistant with every customer's data and a toolbox that can send email, issue refunds, delete records and ship code is not a design we get to decline. It is arriving one integration at a time, and not only in our products.</a:t>
+            </a:r>
+            <a:endParaRPr lang="en-US" sz="1200"/>
+          </a:p>
+          <a:p>
+            <a:pPr marL="0" indent="0">
+              <a:lnSpc>
+                <a:spcPts val="1560"/>
+              </a:lnSpc>
+              <a:spcAft>
+                <a:spcPts val="0"/>
+              </a:spcAft>
+              <a:buNone/>
+            </a:pPr>
+            <a:r>
+              <a:rPr lang="en-US" sz="1200" b="0">
+                <a:solidFill>
+                  <a:srgbClr val="202b33"/>
+                </a:solidFill>
+                <a:latin typeface="Arial"/>
+                <a:ea typeface="Arial"/>
+                <a:cs typeface="Arial"/>
+              </a:rPr>
+              <a:t xml:space="preserve"/>
+            </a:r>
+            <a:endParaRPr lang="en-US" sz="1200"/>
+          </a:p>
+          <a:p>
+            <a:pPr marL="0" indent="0">
+              <a:lnSpc>
+                <a:spcPts val="1560"/>
+              </a:lnSpc>
+              <a:spcAft>
+                <a:spcPts val="0"/>
+              </a:spcAft>
+              <a:buNone/>
+            </a:pPr>
+            <a:r>
+              <a:rPr lang="en-US" sz="1200" b="0">
+                <a:solidFill>
+                  <a:srgbClr val="202b33"/>
+                </a:solidFill>
+                <a:latin typeface="Arial"/>
+                <a:ea typeface="Arial"/>
+                <a:cs typeface="Arial"/>
+              </a:rPr>
+              <a:t xml:space="preserve">Browsers now ship a chat that drives the page. WebMCP lets an agent act on any site that opts in, and the list of sites that opt in only goes one direction. The next generation of CLIs will take natural language by default, and you will pass `--no-agent` to get the old behavior back. The intermediary intelligence layer is going to wrap everything, and I know who to blame: the kids. Actually, the kids hate AI. It will be their kids who demand an agent safety blanket on everything. I will be in a rocking chair explaining that the internet was better on vinyl.</a:t>
             </a:r>
             <a:endParaRPr lang="en-US" sz="1200"/>
           </a:p>
@@ -14448,7 +14494,53 @@
                 <a:ea typeface="Arial"/>
                 <a:cs typeface="Arial"/>
               </a:rPr>
-              <a:t xml:space="preserve">Zoom out from the ingest job. The assistant with every customer's data and a toolbox that can send email, issue refunds, delete records and ship code is not a design we get to decline. It is arriving one integration at a time, and not only in our products. Browsers now ship a chat that drives the page. WebMCP lets an agent act on any site that opts in, and the list of sites that opt in only goes one direction. The next generation of CLIs will take natural language by default, and you will pass `--no-agent` to get the old behavior back. The intermediary intelligence layer is going to wrap everything, and I know who to blame: the kids. Actually, the kids hate AI. It will be their kids who demand an agent safety blanket on everything. I will be in a rocking chair explaining that the internet was better on vinyl.</a:t>
+              <a:t xml:space="preserve">Zoom out from the ingest job. The assistant with every customer's data and a toolbox that can send email, issue refunds, delete records and ship code is not a design we get to decline. It is arriving one integration at a time, and not only in our products.</a:t>
+            </a:r>
+            <a:endParaRPr lang="en-US" sz="1200"/>
+          </a:p>
+          <a:p>
+            <a:pPr marL="0" indent="0">
+              <a:lnSpc>
+                <a:spcPts val="1560"/>
+              </a:lnSpc>
+              <a:spcAft>
+                <a:spcPts val="0"/>
+              </a:spcAft>
+              <a:buNone/>
+            </a:pPr>
+            <a:r>
+              <a:rPr lang="en-US" sz="1200" b="0">
+                <a:solidFill>
+                  <a:srgbClr val="202b33"/>
+                </a:solidFill>
+                <a:latin typeface="Arial"/>
+                <a:ea typeface="Arial"/>
+                <a:cs typeface="Arial"/>
+              </a:rPr>
+              <a:t xml:space="preserve"/>
+            </a:r>
+            <a:endParaRPr lang="en-US" sz="1200"/>
+          </a:p>
+          <a:p>
+            <a:pPr marL="0" indent="0">
+              <a:lnSpc>
+                <a:spcPts val="1560"/>
+              </a:lnSpc>
+              <a:spcAft>
+                <a:spcPts val="0"/>
+              </a:spcAft>
+              <a:buNone/>
+            </a:pPr>
+            <a:r>
+              <a:rPr lang="en-US" sz="1200" b="0">
+                <a:solidFill>
+                  <a:srgbClr val="202b33"/>
+                </a:solidFill>
+                <a:latin typeface="Arial"/>
+                <a:ea typeface="Arial"/>
+                <a:cs typeface="Arial"/>
+              </a:rPr>
+              <a:t xml:space="preserve">Browsers now ship a chat that drives the page. WebMCP lets an agent act on any site that opts in, and the list of sites that opt in only goes one direction. The next generation of CLIs will take natural language by default, and you will pass `--no-agent` to get the old behavior back. The intermediary intelligence layer is going to wrap everything, and I know who to blame: the kids. Actually, the kids hate AI. It will be their kids who demand an agent safety blanket on everything. I will be in a rocking chair explaining that the internet was better on vinyl.</a:t>
             </a:r>
             <a:endParaRPr lang="en-US" sz="1200"/>
           </a:p>
@@ -36313,6 +36405,29 @@
             </a:r>
             <a:endParaRPr lang="en-US" sz="1200"/>
           </a:p>
+          <a:p>
+            <a:pPr marL="0" indent="0">
+              <a:lnSpc>
+                <a:spcPts val="1575"/>
+              </a:lnSpc>
+              <a:spcAft>
+                <a:spcPts val="0"/>
+              </a:spcAft>
+              <a:buNone/>
+            </a:pPr>
+            <a:r>
+              <a:rPr lang="en-US" sz="1200" b="0">
+                <a:solidFill>
+                  <a:srgbClr val="202B33"/>
+                </a:solidFill>
+                <a:latin typeface="Arial"/>
+                <a:ea typeface="Arial"/>
+                <a:cs typeface="Arial"/>
+              </a:rPr>
+              <a:t xml:space="preserve">integration at a time, and not only in our products.</a:t>
+            </a:r>
+            <a:endParaRPr lang="en-US" sz="1200"/>
+          </a:p>
         </p:txBody>
       </p:sp>
       <p:sp>
@@ -36358,7 +36473,7 @@
                 <a:ea typeface="Arial"/>
                 <a:cs typeface="Arial"/>
               </a:rPr>
-              <a:t xml:space="preserve">integration at a time, and not only in our products.</a:t>
+              <a:t xml:space="preserve"/>
             </a:r>
             <a:endParaRPr lang="en-US" sz="1200"/>
           </a:p>
